--- a/assets/pptx/catalog-57.pptx
+++ b/assets/pptx/catalog-57.pptx
@@ -3264,7 +3264,7 @@
                 <a:ea typeface="Ebrima"/>
                 <a:cs typeface="Ebrima"/>
               </a:rPr>
-              <a:t>ናፈቅከኝ ጌታ ናፈቅከኝ ጌታ (2x)</a:t>
+              <a:t>ናፈቅከኝ ጌታ ናፈቅከኝ ጌታ 2x</a:t>
             </a:r>
           </a:p>
         </p:txBody>
@@ -3385,7 +3385,7 @@
                 <a:ea typeface="Ebrima"/>
                 <a:cs typeface="Ebrima"/>
               </a:rPr>
-              <a:t>ክብርህን ለማየት እናፍቃለው (ኦኦው)</a:t>
+              <a:t>ክብርህን ለማየት እናፍቃለው ኦኦው</a:t>
             </a:r>
           </a:p>
         </p:txBody>
@@ -3452,7 +3452,7 @@
                 <a:ea typeface="Ebrima"/>
                 <a:cs typeface="Ebrima"/>
               </a:rPr>
-              <a:t>መንፈስህን (4x)</a:t>
+              <a:t>መንፈስህን 4x</a:t>
             </a:r>
           </a:p>
           <a:p>
@@ -3555,7 +3555,7 @@
                 <a:ea typeface="Ebrima"/>
                 <a:cs typeface="Ebrima"/>
               </a:rPr>
-              <a:t>መንፈስህን (4x)</a:t>
+              <a:t>መንፈስህን 4x</a:t>
             </a:r>
           </a:p>
           <a:p>
@@ -3694,7 +3694,7 @@
                 <a:ea typeface="Ebrima"/>
                 <a:cs typeface="Ebrima"/>
               </a:rPr>
-              <a:t>እጠማሃለው (2x)</a:t>
+              <a:t>እጠማሃለው 2x</a:t>
             </a:r>
           </a:p>
           <a:p>
@@ -3712,7 +3712,7 @@
                 <a:ea typeface="Ebrima"/>
                 <a:cs typeface="Ebrima"/>
               </a:rPr>
-              <a:t>እወድሃለው (2x)</a:t>
+              <a:t>እወድሃለው 2x</a:t>
             </a:r>
           </a:p>
         </p:txBody>
@@ -3833,7 +3833,7 @@
                 <a:ea typeface="Ebrima"/>
                 <a:cs typeface="Ebrima"/>
               </a:rPr>
-              <a:t>መገኘትህን በመንፈሴ ሳይ (2x)</a:t>
+              <a:t>መገኘትህን በመንፈሴ ሳይ 2x</a:t>
             </a:r>
           </a:p>
         </p:txBody>
